--- a/ppt/dtmr-n4.pptx
+++ b/ppt/dtmr-n4.pptx
@@ -3778,14 +3778,14 @@
           <p:nvPr>
             <p:extLst>
               <p:ext uri="{D42A27DB-BD31-4B8C-83A1-F6EECF244321}">
-                <p14:modId xmlns:p14="http://schemas.microsoft.com/office/powerpoint/2010/main" val="2548533273"/>
+                <p14:modId xmlns:p14="http://schemas.microsoft.com/office/powerpoint/2010/main" val="3986976398"/>
               </p:ext>
             </p:extLst>
           </p:nvPr>
         </p:nvGraphicFramePr>
         <p:xfrm>
           <a:off x="7625784" y="728350"/>
-          <a:ext cx="4321383" cy="5954170"/>
+          <a:ext cx="4321383" cy="5149497"/>
         </p:xfrm>
         <a:graphic>
           <a:graphicData uri="http://schemas.openxmlformats.org/drawingml/2006/table">
@@ -3924,7 +3924,7 @@
                   </a:ext>
                 </a:extLst>
               </a:tr>
-              <a:tr h="2066983">
+              <a:tr h="1432469">
                 <a:tc>
                   <a:txBody>
                     <a:bodyPr/>
@@ -4050,6 +4050,49 @@
                     <a:p>
                       <a:r>
                         <a:rPr lang="fr-FR" sz="1200" dirty="0"/>
+                        <a:t>11h30</a:t>
+                      </a:r>
+                    </a:p>
+                  </a:txBody>
+                  <a:tcPr/>
+                </a:tc>
+                <a:tc>
+                  <a:txBody>
+                    <a:bodyPr/>
+                    <a:lstStyle/>
+                    <a:p>
+                      <a:r>
+                        <a:rPr lang="fr-FR" sz="1200" dirty="0"/>
+                        <a:t>Debrief moniteur</a:t>
+                      </a:r>
+                    </a:p>
+                  </a:txBody>
+                  <a:tcPr/>
+                </a:tc>
+                <a:tc>
+                  <a:txBody>
+                    <a:bodyPr/>
+                    <a:lstStyle/>
+                    <a:p>
+                      <a:endParaRPr lang="fr-FR" sz="1200" dirty="0"/>
+                    </a:p>
+                  </a:txBody>
+                  <a:tcPr/>
+                </a:tc>
+                <a:extLst>
+                  <a:ext uri="{0D108BD9-81ED-4DB2-BD59-A6C34878D82A}">
+                    <a16:rowId xmlns:a16="http://schemas.microsoft.com/office/drawing/2014/main" val="689005258"/>
+                  </a:ext>
+                </a:extLst>
+              </a:tr>
+              <a:tr h="316013">
+                <a:tc>
+                  <a:txBody>
+                    <a:bodyPr/>
+                    <a:lstStyle/>
+                    <a:p>
+                      <a:r>
+                        <a:rPr lang="fr-FR" sz="1200" dirty="0"/>
                         <a:t>12h00</a:t>
                       </a:r>
                     </a:p>
@@ -4088,7 +4131,7 @@
                   </a:ext>
                 </a:extLst>
               </a:tr>
-              <a:tr h="2085902">
+              <a:tr h="1599730">
                 <a:tc>
                   <a:txBody>
                     <a:bodyPr/>
@@ -4457,7 +4500,7 @@
             </a:pPr>
             <a:r>
               <a:rPr lang="fr-FR" sz="1600" dirty="0"/>
-              <a:t>Arrêt entre 3 et 5m avec 360</a:t>
+              <a:t>Arrêt entre 6 et 8m avec 360</a:t>
             </a:r>
           </a:p>
           <a:p>
@@ -4487,8 +4530,13 @@
             </a:pPr>
             <a:r>
               <a:rPr lang="fr-FR" sz="1600" dirty="0"/>
-              <a:t>Au moins 1min à 3m</a:t>
-            </a:r>
+              <a:t>Au moins 1min </a:t>
+            </a:r>
+            <a:r>
+              <a:rPr lang="fr-FR" sz="1600"/>
+              <a:t>à 6m</a:t>
+            </a:r>
+            <a:endParaRPr lang="fr-FR" sz="1600" dirty="0"/>
           </a:p>
           <a:p>
             <a:pPr marL="285750" indent="-285750">

--- a/ppt/dtmr-n4.pptx
+++ b/ppt/dtmr-n4.pptx
@@ -3778,7 +3778,7 @@
           <p:nvPr>
             <p:extLst>
               <p:ext uri="{D42A27DB-BD31-4B8C-83A1-F6EECF244321}">
-                <p14:modId xmlns:p14="http://schemas.microsoft.com/office/powerpoint/2010/main" val="3986976398"/>
+                <p14:modId xmlns:p14="http://schemas.microsoft.com/office/powerpoint/2010/main" val="1551853825"/>
               </p:ext>
             </p:extLst>
           </p:nvPr>
@@ -3957,7 +3957,7 @@
                             <a:schemeClr val="accent1"/>
                           </a:solidFill>
                         </a:rPr>
-                        <a:t>25m – Site 1</a:t>
+                        <a:t>25m </a:t>
                       </a:r>
                     </a:p>
                     <a:p>
@@ -4008,7 +4008,7 @@
                             <a:schemeClr val="accent1"/>
                           </a:solidFill>
                         </a:rPr>
-                        <a:t>25m – Site 3</a:t>
+                        <a:t>25m</a:t>
                       </a:r>
                     </a:p>
                     <a:p>
@@ -4164,7 +4164,7 @@
                             <a:schemeClr val="accent1"/>
                           </a:solidFill>
                         </a:rPr>
-                        <a:t>25m – Site 2</a:t>
+                        <a:t>25m </a:t>
                       </a:r>
                     </a:p>
                     <a:p>
@@ -4211,7 +4211,7 @@
                             </a:schemeClr>
                           </a:solidFill>
                         </a:rPr>
-                        <a:t>25m – Site 4</a:t>
+                        <a:t>25m</a:t>
                       </a:r>
                     </a:p>
                     <a:p>
@@ -4413,7 +4413,7 @@
             </a:r>
             <a:r>
               <a:rPr lang="fr-FR" dirty="0"/>
-              <a:t> GP N4 en fin de formation, préparation à l’épreuve de DTMR de 25m</a:t>
+              <a:t> 3 GP N4 en fin de formation, préparation à l’épreuve de DTMR de 25m</a:t>
             </a:r>
           </a:p>
         </p:txBody>
@@ -4530,13 +4530,8 @@
             </a:pPr>
             <a:r>
               <a:rPr lang="fr-FR" sz="1600" dirty="0"/>
-              <a:t>Au moins 1min </a:t>
-            </a:r>
-            <a:r>
-              <a:rPr lang="fr-FR" sz="1600"/>
-              <a:t>à 6m</a:t>
-            </a:r>
-            <a:endParaRPr lang="fr-FR" sz="1600" dirty="0"/>
+              <a:t>Au moins 1min à 6m</a:t>
+            </a:r>
           </a:p>
           <a:p>
             <a:pPr marL="285750" indent="-285750">
@@ -4749,6 +4744,100 @@
               <a:rPr lang="fr-FR" dirty="0"/>
               <a:t>5min à ½, 1min à 6m et 5 min à 3m</a:t>
             </a:r>
+          </a:p>
+        </p:txBody>
+      </p:sp>
+      <p:sp>
+        <p:nvSpPr>
+          <p:cNvPr id="21" name="ZoneTexte 20">
+            <a:extLst>
+              <a:ext uri="{FF2B5EF4-FFF2-40B4-BE49-F238E27FC236}">
+                <a16:creationId xmlns:a16="http://schemas.microsoft.com/office/drawing/2014/main" id="{71B36CB1-DF1A-AD8B-2B5A-6D155FDD5792}"/>
+              </a:ext>
+            </a:extLst>
+          </p:cNvPr>
+          <p:cNvSpPr txBox="1"/>
+          <p:nvPr/>
+        </p:nvSpPr>
+        <p:spPr>
+          <a:xfrm>
+            <a:off x="5399079" y="2918860"/>
+            <a:ext cx="2029979" cy="3139321"/>
+          </a:xfrm>
+          <a:prstGeom prst="rect">
+            <a:avLst/>
+          </a:prstGeom>
+          <a:noFill/>
+        </p:spPr>
+        <p:txBody>
+          <a:bodyPr wrap="none" rtlCol="0">
+            <a:spAutoFit/>
+          </a:bodyPr>
+          <a:lstStyle/>
+          <a:p>
+            <a:r>
+              <a:rPr lang="fr-FR" dirty="0" err="1"/>
+              <a:t>Add</a:t>
+            </a:r>
+            <a:r>
+              <a:rPr lang="fr-FR" dirty="0"/>
+              <a:t> </a:t>
+            </a:r>
+          </a:p>
+          <a:p>
+            <a:r>
+              <a:rPr lang="fr-FR" dirty="0"/>
+              <a:t>timeline</a:t>
+            </a:r>
+          </a:p>
+          <a:p>
+            <a:r>
+              <a:rPr lang="fr-FR" dirty="0"/>
+              <a:t>Profile de plongée</a:t>
+            </a:r>
+          </a:p>
+          <a:p>
+            <a:endParaRPr lang="fr-FR" dirty="0"/>
+          </a:p>
+          <a:p>
+            <a:r>
+              <a:rPr lang="fr-FR" dirty="0"/>
+              <a:t>Préciser</a:t>
+            </a:r>
+          </a:p>
+          <a:p>
+            <a:r>
+              <a:rPr lang="fr-FR" dirty="0"/>
+              <a:t>Les sous objectifs</a:t>
+            </a:r>
+          </a:p>
+          <a:p>
+            <a:endParaRPr lang="fr-FR" dirty="0"/>
+          </a:p>
+          <a:p>
+            <a:r>
+              <a:rPr lang="fr-FR" dirty="0"/>
+              <a:t>Stabilisation</a:t>
+            </a:r>
+          </a:p>
+          <a:p>
+            <a:r>
+              <a:rPr lang="fr-FR" dirty="0"/>
+              <a:t>Vit. Remonté</a:t>
+            </a:r>
+          </a:p>
+          <a:p>
+            <a:r>
+              <a:rPr lang="fr-FR" dirty="0"/>
+              <a:t>Gestion parachute</a:t>
+            </a:r>
+          </a:p>
+          <a:p>
+            <a:r>
+              <a:rPr lang="fr-FR"/>
+              <a:t>Zone 6 – 8m</a:t>
+            </a:r>
+            <a:endParaRPr lang="fr-FR" dirty="0"/>
           </a:p>
         </p:txBody>
       </p:sp>
